--- a/thesis/plots/transformation.pptx
+++ b/thesis/plots/transformation.pptx
@@ -259,7 +259,7 @@
           <a:p>
             <a:fld id="{F168D89B-229C-5345-8340-17EE0F917903}" type="datetimeFigureOut">
               <a:rPr lang="de-DE" smtClean="0"/>
-              <a:t>17.04.24</a:t>
+              <a:t>19.04.24</a:t>
             </a:fld>
             <a:endParaRPr lang="de-DE"/>
           </a:p>
@@ -457,7 +457,7 @@
           <a:p>
             <a:fld id="{F168D89B-229C-5345-8340-17EE0F917903}" type="datetimeFigureOut">
               <a:rPr lang="de-DE" smtClean="0"/>
-              <a:t>17.04.24</a:t>
+              <a:t>19.04.24</a:t>
             </a:fld>
             <a:endParaRPr lang="de-DE"/>
           </a:p>
@@ -665,7 +665,7 @@
           <a:p>
             <a:fld id="{F168D89B-229C-5345-8340-17EE0F917903}" type="datetimeFigureOut">
               <a:rPr lang="de-DE" smtClean="0"/>
-              <a:t>17.04.24</a:t>
+              <a:t>19.04.24</a:t>
             </a:fld>
             <a:endParaRPr lang="de-DE"/>
           </a:p>
@@ -863,7 +863,7 @@
           <a:p>
             <a:fld id="{F168D89B-229C-5345-8340-17EE0F917903}" type="datetimeFigureOut">
               <a:rPr lang="de-DE" smtClean="0"/>
-              <a:t>17.04.24</a:t>
+              <a:t>19.04.24</a:t>
             </a:fld>
             <a:endParaRPr lang="de-DE"/>
           </a:p>
@@ -1138,7 +1138,7 @@
           <a:p>
             <a:fld id="{F168D89B-229C-5345-8340-17EE0F917903}" type="datetimeFigureOut">
               <a:rPr lang="de-DE" smtClean="0"/>
-              <a:t>17.04.24</a:t>
+              <a:t>19.04.24</a:t>
             </a:fld>
             <a:endParaRPr lang="de-DE"/>
           </a:p>
@@ -1403,7 +1403,7 @@
           <a:p>
             <a:fld id="{F168D89B-229C-5345-8340-17EE0F917903}" type="datetimeFigureOut">
               <a:rPr lang="de-DE" smtClean="0"/>
-              <a:t>17.04.24</a:t>
+              <a:t>19.04.24</a:t>
             </a:fld>
             <a:endParaRPr lang="de-DE"/>
           </a:p>
@@ -1815,7 +1815,7 @@
           <a:p>
             <a:fld id="{F168D89B-229C-5345-8340-17EE0F917903}" type="datetimeFigureOut">
               <a:rPr lang="de-DE" smtClean="0"/>
-              <a:t>17.04.24</a:t>
+              <a:t>19.04.24</a:t>
             </a:fld>
             <a:endParaRPr lang="de-DE"/>
           </a:p>
@@ -1956,7 +1956,7 @@
           <a:p>
             <a:fld id="{F168D89B-229C-5345-8340-17EE0F917903}" type="datetimeFigureOut">
               <a:rPr lang="de-DE" smtClean="0"/>
-              <a:t>17.04.24</a:t>
+              <a:t>19.04.24</a:t>
             </a:fld>
             <a:endParaRPr lang="de-DE"/>
           </a:p>
@@ -2069,7 +2069,7 @@
           <a:p>
             <a:fld id="{F168D89B-229C-5345-8340-17EE0F917903}" type="datetimeFigureOut">
               <a:rPr lang="de-DE" smtClean="0"/>
-              <a:t>17.04.24</a:t>
+              <a:t>19.04.24</a:t>
             </a:fld>
             <a:endParaRPr lang="de-DE"/>
           </a:p>
@@ -2380,7 +2380,7 @@
           <a:p>
             <a:fld id="{F168D89B-229C-5345-8340-17EE0F917903}" type="datetimeFigureOut">
               <a:rPr lang="de-DE" smtClean="0"/>
-              <a:t>17.04.24</a:t>
+              <a:t>19.04.24</a:t>
             </a:fld>
             <a:endParaRPr lang="de-DE"/>
           </a:p>
@@ -2668,7 +2668,7 @@
           <a:p>
             <a:fld id="{F168D89B-229C-5345-8340-17EE0F917903}" type="datetimeFigureOut">
               <a:rPr lang="de-DE" smtClean="0"/>
-              <a:t>17.04.24</a:t>
+              <a:t>19.04.24</a:t>
             </a:fld>
             <a:endParaRPr lang="de-DE"/>
           </a:p>
@@ -2909,7 +2909,7 @@
           <a:p>
             <a:fld id="{F168D89B-229C-5345-8340-17EE0F917903}" type="datetimeFigureOut">
               <a:rPr lang="de-DE" smtClean="0"/>
-              <a:t>17.04.24</a:t>
+              <a:t>19.04.24</a:t>
             </a:fld>
             <a:endParaRPr lang="de-DE"/>
           </a:p>
@@ -3406,8 +3406,8 @@
           </a:fontRef>
         </p:style>
       </p:cxnSp>
-      <mc:AlternateContent xmlns:mc="http://schemas.openxmlformats.org/markup-compatibility/2006">
-        <mc:Choice xmlns:a14="http://schemas.microsoft.com/office/drawing/2010/main" Requires="a14">
+      <mc:AlternateContent xmlns:mc="http://schemas.openxmlformats.org/markup-compatibility/2006" xmlns:a14="http://schemas.microsoft.com/office/drawing/2010/main">
+        <mc:Choice Requires="a14">
           <p:sp>
             <p:nvSpPr>
               <p:cNvPr id="9" name="Textfeld 8">
@@ -3457,7 +3457,7 @@
             </p:txBody>
           </p:sp>
         </mc:Choice>
-        <mc:Fallback>
+        <mc:Fallback xmlns="">
           <p:sp>
             <p:nvSpPr>
               <p:cNvPr id="9" name="Textfeld 8">
@@ -3502,8 +3502,8 @@
           </p:sp>
         </mc:Fallback>
       </mc:AlternateContent>
-      <mc:AlternateContent xmlns:mc="http://schemas.openxmlformats.org/markup-compatibility/2006">
-        <mc:Choice xmlns:a14="http://schemas.microsoft.com/office/drawing/2010/main" Requires="a14">
+      <mc:AlternateContent xmlns:mc="http://schemas.openxmlformats.org/markup-compatibility/2006" xmlns:a14="http://schemas.microsoft.com/office/drawing/2010/main">
+        <mc:Choice Requires="a14">
           <p:sp>
             <p:nvSpPr>
               <p:cNvPr id="10" name="Textfeld 9">
@@ -3553,7 +3553,7 @@
             </p:txBody>
           </p:sp>
         </mc:Choice>
-        <mc:Fallback>
+        <mc:Fallback xmlns="">
           <p:sp>
             <p:nvSpPr>
               <p:cNvPr id="10" name="Textfeld 9">
@@ -3598,8 +3598,8 @@
           </p:sp>
         </mc:Fallback>
       </mc:AlternateContent>
-      <mc:AlternateContent xmlns:mc="http://schemas.openxmlformats.org/markup-compatibility/2006">
-        <mc:Choice xmlns:a14="http://schemas.microsoft.com/office/drawing/2010/main" Requires="a14">
+      <mc:AlternateContent xmlns:mc="http://schemas.openxmlformats.org/markup-compatibility/2006" xmlns:a14="http://schemas.microsoft.com/office/drawing/2010/main">
+        <mc:Choice Requires="a14">
           <p:sp>
             <p:nvSpPr>
               <p:cNvPr id="11" name="Textfeld 10">
@@ -3649,7 +3649,7 @@
             </p:txBody>
           </p:sp>
         </mc:Choice>
-        <mc:Fallback>
+        <mc:Fallback xmlns="">
           <p:sp>
             <p:nvSpPr>
               <p:cNvPr id="11" name="Textfeld 10">
@@ -3814,7 +3814,7 @@
           </a:prstGeom>
           <a:ln w="44450">
             <a:solidFill>
-              <a:srgbClr val="0070C0"/>
+              <a:srgbClr val="92D050"/>
             </a:solidFill>
             <a:prstDash val="solid"/>
             <a:tailEnd type="triangle"/>
@@ -3859,7 +3859,7 @@
           </a:prstGeom>
           <a:ln w="44450">
             <a:solidFill>
-              <a:srgbClr val="0070C0"/>
+              <a:srgbClr val="92D050"/>
             </a:solidFill>
             <a:prstDash val="solid"/>
             <a:tailEnd type="triangle"/>
@@ -3904,7 +3904,7 @@
           </a:prstGeom>
           <a:ln w="44450">
             <a:solidFill>
-              <a:srgbClr val="0070C0"/>
+              <a:srgbClr val="92D050"/>
             </a:solidFill>
             <a:prstDash val="solid"/>
             <a:tailEnd type="triangle"/>
@@ -4006,7 +4006,7 @@
                       <m:r>
                         <a:rPr lang="de-DE" i="1" dirty="0" smtClean="0">
                           <a:solidFill>
-                            <a:srgbClr val="0070C0"/>
+                            <a:srgbClr val="92D050"/>
                           </a:solidFill>
                           <a:latin typeface="Cambria Math" panose="02040503050406030204" pitchFamily="18" charset="0"/>
                         </a:rPr>
@@ -4017,7 +4017,7 @@
                 </a14:m>
                 <a:endParaRPr lang="de-DE" dirty="0">
                   <a:solidFill>
-                    <a:srgbClr val="0070C0"/>
+                    <a:srgbClr val="92D050"/>
                   </a:solidFill>
                 </a:endParaRPr>
               </a:p>
@@ -4109,7 +4109,7 @@
                       <m:r>
                         <a:rPr lang="de-DE" i="1" dirty="0" smtClean="0">
                           <a:solidFill>
-                            <a:srgbClr val="0070C0"/>
+                            <a:srgbClr val="92D050"/>
                           </a:solidFill>
                           <a:latin typeface="Cambria Math" panose="02040503050406030204" pitchFamily="18" charset="0"/>
                         </a:rPr>
@@ -4120,7 +4120,7 @@
                 </a14:m>
                 <a:endParaRPr lang="de-DE" dirty="0">
                   <a:solidFill>
-                    <a:srgbClr val="0070C0"/>
+                    <a:srgbClr val="92D050"/>
                   </a:solidFill>
                 </a:endParaRPr>
               </a:p>
@@ -4212,7 +4212,7 @@
                       <m:r>
                         <a:rPr lang="de-DE" i="1" dirty="0" smtClean="0">
                           <a:solidFill>
-                            <a:srgbClr val="0070C0"/>
+                            <a:srgbClr val="92D050"/>
                           </a:solidFill>
                           <a:latin typeface="Cambria Math" panose="02040503050406030204" pitchFamily="18" charset="0"/>
                         </a:rPr>
@@ -4223,7 +4223,7 @@
                 </a14:m>
                 <a:endParaRPr lang="de-DE" dirty="0">
                   <a:solidFill>
-                    <a:srgbClr val="0070C0"/>
+                    <a:srgbClr val="92D050"/>
                   </a:solidFill>
                 </a:endParaRPr>
               </a:p>
@@ -4275,8 +4275,8 @@
           </p:sp>
         </mc:Fallback>
       </mc:AlternateContent>
-      <mc:AlternateContent xmlns:mc="http://schemas.openxmlformats.org/markup-compatibility/2006" xmlns:a14="http://schemas.microsoft.com/office/drawing/2010/main">
-        <mc:Choice Requires="a14">
+      <mc:AlternateContent xmlns:mc="http://schemas.openxmlformats.org/markup-compatibility/2006">
+        <mc:Choice xmlns:a14="http://schemas.microsoft.com/office/drawing/2010/main" Requires="a14">
           <p:sp>
             <p:nvSpPr>
               <p:cNvPr id="19" name="Textfeld 18">
@@ -4315,7 +4315,7 @@
                       <m:r>
                         <a:rPr lang="de-DE" i="1" dirty="0" smtClean="0">
                           <a:solidFill>
-                            <a:srgbClr val="0070C0"/>
+                            <a:srgbClr val="92D050"/>
                           </a:solidFill>
                           <a:latin typeface="Cambria Math" panose="02040503050406030204" pitchFamily="18" charset="0"/>
                         </a:rPr>
@@ -4326,14 +4326,14 @@
                 </a14:m>
                 <a:endParaRPr lang="de-DE" dirty="0">
                   <a:solidFill>
-                    <a:srgbClr val="0070C0"/>
+                    <a:srgbClr val="92D050"/>
                   </a:solidFill>
                 </a:endParaRPr>
               </a:p>
             </p:txBody>
           </p:sp>
         </mc:Choice>
-        <mc:Fallback xmlns="">
+        <mc:Fallback>
           <p:sp>
             <p:nvSpPr>
               <p:cNvPr id="19" name="Textfeld 18">
@@ -4420,8 +4420,8 @@
           </a:fontRef>
         </p:style>
       </p:cxnSp>
-      <mc:AlternateContent xmlns:mc="http://schemas.openxmlformats.org/markup-compatibility/2006" xmlns:a14="http://schemas.microsoft.com/office/drawing/2010/main">
-        <mc:Choice Requires="a14">
+      <mc:AlternateContent xmlns:mc="http://schemas.openxmlformats.org/markup-compatibility/2006">
+        <mc:Choice xmlns:a14="http://schemas.microsoft.com/office/drawing/2010/main" Requires="a14">
           <p:sp>
             <p:nvSpPr>
               <p:cNvPr id="6" name="Textfeld 5">
@@ -4436,7 +4436,7 @@
             </p:nvSpPr>
             <p:spPr>
               <a:xfrm>
-                <a:off x="5868053" y="3578698"/>
+                <a:off x="5868053" y="3561764"/>
                 <a:ext cx="455894" cy="374718"/>
               </a:xfrm>
               <a:prstGeom prst="rect">
@@ -4498,7 +4498,7 @@
             </p:txBody>
           </p:sp>
         </mc:Choice>
-        <mc:Fallback xmlns="">
+        <mc:Fallback>
           <p:sp>
             <p:nvSpPr>
               <p:cNvPr id="6" name="Textfeld 5">
@@ -4515,7 +4515,7 @@
             </p:nvSpPr>
             <p:spPr>
               <a:xfrm>
-                <a:off x="5868053" y="3578698"/>
+                <a:off x="5868053" y="3561764"/>
                 <a:ext cx="455894" cy="374718"/>
               </a:xfrm>
               <a:prstGeom prst="rect">
